--- a/content/Lectures/Semester 1/Week 08 - Networks - Shortest Paths and MST/5 Source Files/Week 8 - Tutorial - Networks - Q2 Answers.pptx
+++ b/content/Lectures/Semester 1/Week 08 - Networks - Shortest Paths and MST/5 Source Files/Week 8 - Tutorial - Networks - Q2 Answers.pptx
@@ -7000,7 +7000,7 @@
 </file>
 
 <file path=ppt/slides/slide10.xml><?xml version="1.0" encoding="utf-8"?>
-<p:sld xmlns:a="http://schemas.openxmlformats.org/drawingml/2006/main" xmlns:r="http://schemas.openxmlformats.org/officeDocument/2006/relationships" xmlns:p="http://schemas.openxmlformats.org/presentationml/2006/main">
+<p:sld xmlns:a="http://schemas.openxmlformats.org/drawingml/2006/main" xmlns:r="http://schemas.openxmlformats.org/officeDocument/2006/relationships" xmlns:p="http://schemas.openxmlformats.org/presentationml/2006/main" show="0">
   <p:cSld>
     <p:spTree>
       <p:nvGrpSpPr>
@@ -23256,7 +23256,7 @@
                           <a:pPr algn="r"/>
                           <a:r>
                             <a:rPr lang="en-GB" dirty="0"/>
-                            <a:t>v</a:t>
+                            <a:t>i</a:t>
                           </a:r>
                         </a:p>
                       </a:txBody>
@@ -23681,7 +23681,7 @@
                           <a:pPr algn="r"/>
                           <a:r>
                             <a:rPr lang="en-GB" dirty="0"/>
-                            <a:t>v</a:t>
+                            <a:t>i</a:t>
                           </a:r>
                         </a:p>
                       </a:txBody>
@@ -35171,7 +35171,7 @@
         <p:spPr>
           <a:xfrm>
             <a:off x="849489" y="5014590"/>
-            <a:ext cx="5274272" cy="1200329"/>
+            <a:ext cx="5274272" cy="1477328"/>
           </a:xfrm>
           <a:prstGeom prst="rect">
             <a:avLst/>
@@ -35196,6 +35196,12 @@
             <a:r>
               <a:rPr lang="en-GB" dirty="0"/>
               <a:t>(1,3,4) with a total of 5</a:t>
+            </a:r>
+          </a:p>
+          <a:p>
+            <a:r>
+              <a:rPr lang="en-GB" dirty="0"/>
+              <a:t>(1,2,3,4) also has a total of 5: both are shortest paths</a:t>
             </a:r>
           </a:p>
         </p:txBody>
